--- a/Iteracja_2.pptx
+++ b/Iteracja_2.pptx
@@ -683,7 +683,7 @@
           <a:p>
             <a:fld id="{5BCAD085-E8A6-8845-BD4E-CB4CCA059FC4}" type="datetimeFigureOut">
               <a:rPr lang="en-US" smtClean="0"/>
-              <a:t>5/21/2026</a:t>
+              <a:t>6/10/2026</a:t>
             </a:fld>
             <a:endParaRPr lang="en-US"/>
           </a:p>
@@ -784,7 +784,7 @@
           </a:ln>
           <a:extLst>
             <a:ext uri="{91240B29-F687-4f45-9708-019B960494DF}">
-              <a14:hiddenLine xmlns="" xmlns:a14="http://schemas.microsoft.com/office/drawing/2010/main" w="9525">
+              <a14:hiddenLine xmlns:a14="http://schemas.microsoft.com/office/drawing/2010/main" xmlns="" w="9525">
                 <a:solidFill>
                   <a:srgbClr val="000000"/>
                 </a:solidFill>
@@ -846,7 +846,7 @@
           </a:ln>
           <a:extLst>
             <a:ext uri="{91240B29-F687-4f45-9708-019B960494DF}">
-              <a14:hiddenLine xmlns="" xmlns:a14="http://schemas.microsoft.com/office/drawing/2010/main" w="9525">
+              <a14:hiddenLine xmlns:a14="http://schemas.microsoft.com/office/drawing/2010/main" xmlns="" w="9525">
                 <a:solidFill>
                   <a:srgbClr val="000000"/>
                 </a:solidFill>
@@ -1108,7 +1108,7 @@
           <a:p>
             <a:fld id="{5BCAD085-E8A6-8845-BD4E-CB4CCA059FC4}" type="datetimeFigureOut">
               <a:rPr lang="en-US" smtClean="0"/>
-              <a:t>5/21/2026</a:t>
+              <a:t>6/10/2026</a:t>
             </a:fld>
             <a:endParaRPr lang="en-US"/>
           </a:p>
@@ -1356,7 +1356,7 @@
           <a:p>
             <a:fld id="{5BCAD085-E8A6-8845-BD4E-CB4CCA059FC4}" type="datetimeFigureOut">
               <a:rPr lang="en-US" smtClean="0"/>
-              <a:t>5/21/2026</a:t>
+              <a:t>6/10/2026</a:t>
             </a:fld>
             <a:endParaRPr lang="en-US"/>
           </a:p>
@@ -1896,7 +1896,7 @@
           <a:p>
             <a:fld id="{5BCAD085-E8A6-8845-BD4E-CB4CCA059FC4}" type="datetimeFigureOut">
               <a:rPr lang="en-US" smtClean="0"/>
-              <a:t>5/21/2026</a:t>
+              <a:t>6/10/2026</a:t>
             </a:fld>
             <a:endParaRPr lang="en-US"/>
           </a:p>
@@ -2144,7 +2144,7 @@
           <a:p>
             <a:fld id="{5BCAD085-E8A6-8845-BD4E-CB4CCA059FC4}" type="datetimeFigureOut">
               <a:rPr lang="en-US" smtClean="0"/>
-              <a:t>5/21/2026</a:t>
+              <a:t>6/10/2026</a:t>
             </a:fld>
             <a:endParaRPr lang="en-US"/>
           </a:p>
@@ -2676,7 +2676,7 @@
           <a:p>
             <a:fld id="{5BCAD085-E8A6-8845-BD4E-CB4CCA059FC4}" type="datetimeFigureOut">
               <a:rPr lang="en-US" smtClean="0"/>
-              <a:t>5/21/2026</a:t>
+              <a:t>6/10/2026</a:t>
             </a:fld>
             <a:endParaRPr lang="en-US"/>
           </a:p>
@@ -2973,7 +2973,7 @@
           <a:p>
             <a:fld id="{5BCAD085-E8A6-8845-BD4E-CB4CCA059FC4}" type="datetimeFigureOut">
               <a:rPr lang="en-US" smtClean="0"/>
-              <a:t>5/21/2026</a:t>
+              <a:t>6/10/2026</a:t>
             </a:fld>
             <a:endParaRPr lang="en-US"/>
           </a:p>
@@ -3147,7 +3147,7 @@
           <a:p>
             <a:fld id="{5BCAD085-E8A6-8845-BD4E-CB4CCA059FC4}" type="datetimeFigureOut">
               <a:rPr lang="en-US" smtClean="0"/>
-              <a:t>5/21/2026</a:t>
+              <a:t>6/10/2026</a:t>
             </a:fld>
             <a:endParaRPr lang="en-US"/>
           </a:p>
@@ -3327,7 +3327,7 @@
           <a:p>
             <a:fld id="{5BCAD085-E8A6-8845-BD4E-CB4CCA059FC4}" type="datetimeFigureOut">
               <a:rPr lang="en-US" smtClean="0"/>
-              <a:t>5/21/2026</a:t>
+              <a:t>6/10/2026</a:t>
             </a:fld>
             <a:endParaRPr lang="en-US"/>
           </a:p>
@@ -3512,7 +3512,7 @@
           <a:p>
             <a:fld id="{5BCAD085-E8A6-8845-BD4E-CB4CCA059FC4}" type="datetimeFigureOut">
               <a:rPr lang="en-US" smtClean="0"/>
-              <a:t>5/21/2026</a:t>
+              <a:t>6/10/2026</a:t>
             </a:fld>
             <a:endParaRPr lang="en-US"/>
           </a:p>
@@ -3768,7 +3768,7 @@
           <a:p>
             <a:fld id="{5BCAD085-E8A6-8845-BD4E-CB4CCA059FC4}" type="datetimeFigureOut">
               <a:rPr lang="en-US" smtClean="0"/>
-              <a:t>5/21/2026</a:t>
+              <a:t>6/10/2026</a:t>
             </a:fld>
             <a:endParaRPr lang="en-US"/>
           </a:p>
@@ -4070,7 +4070,7 @@
           <a:p>
             <a:fld id="{5BCAD085-E8A6-8845-BD4E-CB4CCA059FC4}" type="datetimeFigureOut">
               <a:rPr lang="en-US" smtClean="0"/>
-              <a:t>5/21/2026</a:t>
+              <a:t>6/10/2026</a:t>
             </a:fld>
             <a:endParaRPr lang="en-US"/>
           </a:p>
@@ -4512,7 +4512,7 @@
           <a:p>
             <a:fld id="{5BCAD085-E8A6-8845-BD4E-CB4CCA059FC4}" type="datetimeFigureOut">
               <a:rPr lang="en-US" smtClean="0"/>
-              <a:t>5/21/2026</a:t>
+              <a:t>6/10/2026</a:t>
             </a:fld>
             <a:endParaRPr lang="en-US"/>
           </a:p>
@@ -4630,7 +4630,7 @@
           <a:p>
             <a:fld id="{5BCAD085-E8A6-8845-BD4E-CB4CCA059FC4}" type="datetimeFigureOut">
               <a:rPr lang="en-US" smtClean="0"/>
-              <a:t>5/21/2026</a:t>
+              <a:t>6/10/2026</a:t>
             </a:fld>
             <a:endParaRPr lang="en-US"/>
           </a:p>
@@ -4725,7 +4725,7 @@
           <a:p>
             <a:fld id="{5BCAD085-E8A6-8845-BD4E-CB4CCA059FC4}" type="datetimeFigureOut">
               <a:rPr lang="en-US" smtClean="0"/>
-              <a:t>5/21/2026</a:t>
+              <a:t>6/10/2026</a:t>
             </a:fld>
             <a:endParaRPr lang="en-US"/>
           </a:p>
@@ -5008,7 +5008,7 @@
           <a:p>
             <a:fld id="{5BCAD085-E8A6-8845-BD4E-CB4CCA059FC4}" type="datetimeFigureOut">
               <a:rPr lang="en-US" smtClean="0"/>
-              <a:t>5/21/2026</a:t>
+              <a:t>6/10/2026</a:t>
             </a:fld>
             <a:endParaRPr lang="en-US"/>
           </a:p>
@@ -5299,7 +5299,7 @@
           <a:p>
             <a:fld id="{5BCAD085-E8A6-8845-BD4E-CB4CCA059FC4}" type="datetimeFigureOut">
               <a:rPr lang="en-US" smtClean="0"/>
-              <a:t>5/21/2026</a:t>
+              <a:t>6/10/2026</a:t>
             </a:fld>
             <a:endParaRPr lang="en-US"/>
           </a:p>
@@ -5865,7 +5865,7 @@
           <a:p>
             <a:fld id="{5BCAD085-E8A6-8845-BD4E-CB4CCA059FC4}" type="datetimeFigureOut">
               <a:rPr lang="en-US" smtClean="0"/>
-              <a:t>5/21/2026</a:t>
+              <a:t>6/10/2026</a:t>
             </a:fld>
             <a:endParaRPr lang="en-US"/>
           </a:p>
@@ -6912,42 +6912,7 @@
               <a:rPr dirty="0" err="1"/>
               <a:t>krajów</a:t>
             </a:r>
-            <a:r>
-              <a:rPr dirty="0"/>
-              <a:t> </a:t>
-            </a:r>
-            <a:r>
-              <a:rPr dirty="0" err="1"/>
-              <a:t>na</a:t>
-            </a:r>
-            <a:r>
-              <a:rPr dirty="0"/>
-              <a:t> </a:t>
-            </a:r>
-            <a:r>
-              <a:rPr dirty="0" err="1"/>
-              <a:t>macierz</a:t>
-            </a:r>
-            <a:r>
-              <a:rPr dirty="0"/>
-              <a:t> </a:t>
-            </a:r>
-            <a:r>
-              <a:rPr dirty="0" err="1"/>
-              <a:t>zmiennych</a:t>
-            </a:r>
-            <a:r>
-              <a:rPr dirty="0"/>
-              <a:t> </a:t>
-            </a:r>
-            <a:r>
-              <a:rPr dirty="0" err="1"/>
-              <a:t>binarnych</a:t>
-            </a:r>
-            <a:r>
-              <a:rPr dirty="0"/>
-              <a:t>.</a:t>
-            </a:r>
+            <a:endParaRPr lang="pl-PL" dirty="0"/>
           </a:p>
           <a:p>
             <a:r>
